--- a/docs/lectures/lecture_02/02_01_lecture_powerpoint.pptx
+++ b/docs/lectures/lecture_02/02_01_lecture_powerpoint.pptx
@@ -4043,7 +4043,7 @@
       </p:sp>
       <p:graphicFrame xmlns:a="http://schemas.openxmlformats.org/drawingml/2006/main" xmlns:r="http://schemas.openxmlformats.org/officeDocument/2006/relationships" xmlns:p="http://schemas.openxmlformats.org/presentationml/2006/main">
         <p:nvGraphicFramePr>
-          <p:cNvPr id="535786472" name=""/>
+          <p:cNvPr id="236779581" name=""/>
           <p:cNvGraphicFramePr>
             <a:graphicFrameLocks noGrp="true"/>
           </p:cNvGraphicFramePr>

--- a/docs/lectures/lecture_02/02_01_lecture_powerpoint.pptx
+++ b/docs/lectures/lecture_02/02_01_lecture_powerpoint.pptx
@@ -4043,7 +4043,7 @@
       </p:sp>
       <p:graphicFrame xmlns:a="http://schemas.openxmlformats.org/drawingml/2006/main" xmlns:r="http://schemas.openxmlformats.org/officeDocument/2006/relationships" xmlns:p="http://schemas.openxmlformats.org/presentationml/2006/main">
         <p:nvGraphicFramePr>
-          <p:cNvPr id="236779581" name=""/>
+          <p:cNvPr id="126908020" name=""/>
           <p:cNvGraphicFramePr>
             <a:graphicFrameLocks noGrp="true"/>
           </p:cNvGraphicFramePr>

--- a/docs/lectures/lecture_02/02_01_lecture_powerpoint.pptx
+++ b/docs/lectures/lecture_02/02_01_lecture_powerpoint.pptx
@@ -4043,7 +4043,7 @@
       </p:sp>
       <p:graphicFrame xmlns:a="http://schemas.openxmlformats.org/drawingml/2006/main" xmlns:r="http://schemas.openxmlformats.org/officeDocument/2006/relationships" xmlns:p="http://schemas.openxmlformats.org/presentationml/2006/main">
         <p:nvGraphicFramePr>
-          <p:cNvPr id="888332320" name=""/>
+          <p:cNvPr id="346001818" name=""/>
           <p:cNvGraphicFramePr>
             <a:graphicFrameLocks noGrp="true"/>
           </p:cNvGraphicFramePr>
